--- a/GPTI-Tema-6/Actividad 6.2 Reporte de Practica_CynthiaMorales_GPTI_7ISCM.docx.pptx
+++ b/GPTI-Tema-6/Actividad 6.2 Reporte de Practica_CynthiaMorales_GPTI_7ISCM.docx.pptx
@@ -20,6 +20,7 @@
     <p:sldId id="268" r:id="rId14"/>
     <p:sldId id="269" r:id="rId15"/>
     <p:sldId id="270" r:id="rId16"/>
+    <p:sldId id="271" r:id="rId17"/>
   </p:sldIdLst>
   <p:sldSz cx="12192000" cy="6858000"/>
   <p:notesSz cx="6858000" cy="9144000"/>
@@ -7195,6 +7196,107 @@
 </p:sld>
 </file>
 
+<file path=ppt/slides/slide16.xml><?xml version="1.0" encoding="utf-8"?>
+<p:sld xmlns:a="http://schemas.openxmlformats.org/drawingml/2006/main" xmlns:r="http://schemas.openxmlformats.org/officeDocument/2006/relationships" xmlns:p="http://schemas.openxmlformats.org/presentationml/2006/main">
+  <p:cSld>
+    <p:spTree>
+      <p:nvGrpSpPr>
+        <p:cNvPr id="1" name=""/>
+        <p:cNvGrpSpPr/>
+        <p:nvPr/>
+      </p:nvGrpSpPr>
+      <p:grpSpPr>
+        <a:xfrm>
+          <a:off x="0" y="0"/>
+          <a:ext cx="0" cy="0"/>
+          <a:chOff x="0" y="0"/>
+          <a:chExt cx="0" cy="0"/>
+        </a:xfrm>
+      </p:grpSpPr>
+      <p:sp>
+        <p:nvSpPr>
+          <p:cNvPr id="3" name="CuadroTexto 2">
+            <a:hlinkClick r:id="rId2"/>
+            <a:extLst>
+              <a:ext uri="{FF2B5EF4-FFF2-40B4-BE49-F238E27FC236}">
+                <a16:creationId xmlns:a16="http://schemas.microsoft.com/office/drawing/2014/main" id="{8FF768D8-B948-FD46-0108-8B9BCC88AD56}"/>
+              </a:ext>
+            </a:extLst>
+          </p:cNvPr>
+          <p:cNvSpPr txBox="1"/>
+          <p:nvPr/>
+        </p:nvSpPr>
+        <p:spPr>
+          <a:xfrm>
+            <a:off x="555171" y="2828836"/>
+            <a:ext cx="10896600" cy="646331"/>
+          </a:xfrm>
+          <a:prstGeom prst="rect">
+            <a:avLst/>
+          </a:prstGeom>
+          <a:noFill/>
+        </p:spPr>
+        <p:txBody>
+          <a:bodyPr wrap="square">
+            <a:spAutoFit/>
+          </a:bodyPr>
+          <a:lstStyle/>
+          <a:p>
+            <a:r>
+              <a:rPr lang="es-MX" dirty="0"/>
+              <a:t>https://github.com/Cynthia21Morales/GPTI_CynthiaJasmineMT/blob/main/GPTI-Tema-6/Actividad%206.2%20Reporte%20de%20Practica_CynthiaMorales_GPTI_7ISCM.docx.pptx</a:t>
+            </a:r>
+          </a:p>
+        </p:txBody>
+      </p:sp>
+      <p:sp>
+        <p:nvSpPr>
+          <p:cNvPr id="4" name="CuadroTexto 3">
+            <a:extLst>
+              <a:ext uri="{FF2B5EF4-FFF2-40B4-BE49-F238E27FC236}">
+                <a16:creationId xmlns:a16="http://schemas.microsoft.com/office/drawing/2014/main" id="{DF6A7A2A-A80D-F372-6A4E-E0C6772C990F}"/>
+              </a:ext>
+            </a:extLst>
+          </p:cNvPr>
+          <p:cNvSpPr txBox="1"/>
+          <p:nvPr/>
+        </p:nvSpPr>
+        <p:spPr>
+          <a:xfrm>
+            <a:off x="468086" y="1360714"/>
+            <a:ext cx="9699171" cy="954107"/>
+          </a:xfrm>
+          <a:prstGeom prst="rect">
+            <a:avLst/>
+          </a:prstGeom>
+          <a:noFill/>
+        </p:spPr>
+        <p:txBody>
+          <a:bodyPr wrap="square" rtlCol="0">
+            <a:spAutoFit/>
+          </a:bodyPr>
+          <a:lstStyle/>
+          <a:p>
+            <a:r>
+              <a:rPr lang="es-MX" sz="2800" dirty="0"/>
+              <a:t>ANEXO LINK DE LA ACTIVIDAD SOLICITADA Y ENVIADA POR GITHUB:</a:t>
+            </a:r>
+          </a:p>
+        </p:txBody>
+      </p:sp>
+    </p:spTree>
+    <p:extLst>
+      <p:ext uri="{BB962C8B-B14F-4D97-AF65-F5344CB8AC3E}">
+        <p14:creationId xmlns:p14="http://schemas.microsoft.com/office/powerpoint/2010/main" val="2606730318"/>
+      </p:ext>
+    </p:extLst>
+  </p:cSld>
+  <p:clrMapOvr>
+    <a:masterClrMapping/>
+  </p:clrMapOvr>
+</p:sld>
+</file>
+
 <file path=ppt/slides/slide2.xml><?xml version="1.0" encoding="utf-8"?>
 <p:sld xmlns:a="http://schemas.openxmlformats.org/drawingml/2006/main" xmlns:r="http://schemas.openxmlformats.org/officeDocument/2006/relationships" xmlns:p="http://schemas.openxmlformats.org/presentationml/2006/main">
   <p:cSld>
